--- a/deliverable/BRIDGE_01a0aa00_v2.8.1.pptx
+++ b/deliverable/BRIDGE_01a0aa00_v2.8.1.pptx
@@ -3668,7 +3668,7 @@
               <a:defRPr sz="1500"/>
             </a:pPr>
             <a:r>
-              <a:t>本轮 round 1：awaiting_check / pending —— 等值守回传（默认 2 分钟一轮询）</a:t>
+              <a:t>本轮 round 20：awaiting_check / pending —— 等值守回传（默认 2 分钟一轮询）</a:t>
             </a:r>
           </a:p>
           <a:p>

--- a/deliverable/BRIDGE_01a0aa00_v2.8.1.pptx
+++ b/deliverable/BRIDGE_01a0aa00_v2.8.1.pptx
@@ -3668,7 +3668,7 @@
               <a:defRPr sz="1500"/>
             </a:pPr>
             <a:r>
-              <a:t>本轮 round 20：awaiting_check / pending —— 等值守回传（默认 2 分钟一轮询）</a:t>
+              <a:t>值守默认 2 分钟一轮询：pull -&gt; 跑检查 -&gt; 把结论和日志 push 回分支</a:t>
             </a:r>
           </a:p>
           <a:p>
